--- a/yocto_training_all_session_decks/session_decks/D1S2_Linux_Fundamentals_Part1.pptx
+++ b/yocto_training_all_session_decks/session_decks/D1S2_Linux_Fundamentals_Part1.pptx
@@ -2930,7 +2930,7 @@
           <a:p>
             <a:fld id="{0CEC647C-F50C-4F78-AA33-D7AA6CDA18EE}" type="datetimeFigureOut">
               <a:rPr lang="en-US" smtClean="0"/>
-              <a:t>5/28/2026</a:t>
+              <a:t>6/8/2026</a:t>
             </a:fld>
             <a:endParaRPr lang="en-US"/>
           </a:p>
@@ -3095,7 +3095,7 @@
           <a:p>
             <a:fld id="{3A83341F-E62C-483B-84B4-966F8BE46097}" type="datetimeFigureOut">
               <a:rPr lang="en-US" smtClean="0"/>
-              <a:t>5/28/2026</a:t>
+              <a:t>6/8/2026</a:t>
             </a:fld>
             <a:endParaRPr lang="en-US"/>
           </a:p>
@@ -5212,13 +5212,31 @@
           <a:lstStyle/>
           <a:p>
             <a:r>
-              <a:rPr sz="4400" b="1">
+              <a:rPr sz="4400" b="1" dirty="0">
                 <a:solidFill>
                   <a:srgbClr val="FFFFFF"/>
                 </a:solidFill>
                 <a:latin typeface="Calibri"/>
               </a:rPr>
-              <a:t>Linux Fundamentals — Part 1</a:t>
+              <a:t>Linux Fundamentals </a:t>
+            </a:r>
+            <a:r>
+              <a:rPr lang="en-IN" sz="4400" b="1" dirty="0">
+                <a:solidFill>
+                  <a:srgbClr val="FFFFFF"/>
+                </a:solidFill>
+                <a:latin typeface="Calibri"/>
+              </a:rPr>
+              <a:t>:</a:t>
+            </a:r>
+            <a:r>
+              <a:rPr sz="4400" b="1" dirty="0">
+                <a:solidFill>
+                  <a:srgbClr val="FFFFFF"/>
+                </a:solidFill>
+                <a:latin typeface="Calibri"/>
+              </a:rPr>
+              <a:t> Part 1</a:t>
             </a:r>
           </a:p>
         </p:txBody>
@@ -5291,10 +5309,7 @@
           <a:lstStyle/>
           <a:p>
             <a:r>
-              <a:rPr sz="3200" b="1">
-                <a:solidFill>
-                  <a:srgbClr val="CC0066"/>
-                </a:solidFill>
+              <a:rPr sz="3200" b="1" dirty="0">
                 <a:latin typeface="Calibri"/>
               </a:rPr>
               <a:t>Session Agenda</a:t>
@@ -5336,7 +5351,25 @@
                 </a:solidFill>
                 <a:latin typeface="Calibri"/>
               </a:rPr>
-              <a:t>1.  Filesystem hierarchy — where things live</a:t>
+              <a:t>1.  Filesystem hierarchy </a:t>
+            </a:r>
+            <a:r>
+              <a:rPr lang="en-IN" sz="2000" dirty="0">
+                <a:solidFill>
+                  <a:srgbClr val="333333"/>
+                </a:solidFill>
+                <a:latin typeface="Calibri"/>
+              </a:rPr>
+              <a:t>: </a:t>
+            </a:r>
+            <a:r>
+              <a:rPr sz="2000" b="0" i="0" dirty="0">
+                <a:solidFill>
+                  <a:srgbClr val="333333"/>
+                </a:solidFill>
+                <a:latin typeface="Calibri"/>
+              </a:rPr>
+              <a:t>where things live</a:t>
             </a:r>
           </a:p>
           <a:p>
@@ -5352,7 +5385,25 @@
                 </a:solidFill>
                 <a:latin typeface="Calibri"/>
               </a:rPr>
-              <a:t>2.  /proc, /sys, /dev — the kernel's interfaces</a:t>
+              <a:t>2.  /proc, /sys, /dev </a:t>
+            </a:r>
+            <a:r>
+              <a:rPr lang="en-IN" sz="2000" dirty="0">
+                <a:solidFill>
+                  <a:srgbClr val="333333"/>
+                </a:solidFill>
+                <a:latin typeface="Calibri"/>
+              </a:rPr>
+              <a:t>:</a:t>
+            </a:r>
+            <a:r>
+              <a:rPr sz="2000" b="0" i="0" dirty="0">
+                <a:solidFill>
+                  <a:srgbClr val="333333"/>
+                </a:solidFill>
+                <a:latin typeface="Calibri"/>
+              </a:rPr>
+              <a:t> the kernel's interfaces</a:t>
             </a:r>
           </a:p>
           <a:p>
@@ -5384,7 +5435,25 @@
                 </a:solidFill>
                 <a:latin typeface="Calibri"/>
               </a:rPr>
-              <a:t>4.  Capabilities — finer-grained than root</a:t>
+              <a:t>4.  Capabilities</a:t>
+            </a:r>
+            <a:r>
+              <a:rPr lang="en-IN" sz="2000" b="0" i="0" dirty="0">
+                <a:solidFill>
+                  <a:srgbClr val="333333"/>
+                </a:solidFill>
+                <a:latin typeface="Calibri"/>
+              </a:rPr>
+              <a:t>:</a:t>
+            </a:r>
+            <a:r>
+              <a:rPr sz="2000" b="0" i="0" dirty="0">
+                <a:solidFill>
+                  <a:srgbClr val="333333"/>
+                </a:solidFill>
+                <a:latin typeface="Calibri"/>
+              </a:rPr>
+              <a:t> finer-grained than root</a:t>
             </a:r>
           </a:p>
           <a:p>
@@ -5428,13 +5497,22 @@
               <a:t>Cgroups</a:t>
             </a:r>
             <a:r>
+              <a:rPr lang="en-IN" sz="2000" dirty="0">
+                <a:solidFill>
+                  <a:srgbClr val="333333"/>
+                </a:solidFill>
+                <a:latin typeface="Calibri"/>
+              </a:rPr>
+              <a:t>:</a:t>
+            </a:r>
+            <a:r>
               <a:rPr sz="2000" b="0" i="0" dirty="0">
                 <a:solidFill>
                   <a:srgbClr val="333333"/>
                 </a:solidFill>
                 <a:latin typeface="Calibri"/>
               </a:rPr>
-              <a:t> — what they are, why they matter for embedded</a:t>
+              <a:t> what they are, why they matter for embedded</a:t>
             </a:r>
           </a:p>
         </p:txBody>
@@ -6156,7 +6234,7 @@
               </a:spcAft>
             </a:pPr>
             <a:r>
-              <a:rPr b="1" i="0">
+              <a:rPr b="1" i="0" dirty="0">
                 <a:solidFill>
                   <a:srgbClr val="CC0066"/>
                 </a:solidFill>
@@ -6171,7 +6249,7 @@
                 <a:spcPts val="400"/>
               </a:spcAft>
             </a:pPr>
-            <a:endParaRPr b="1" i="0">
+            <a:endParaRPr b="1" i="0" dirty="0">
               <a:solidFill>
                 <a:srgbClr val="CC0066"/>
               </a:solidFill>
@@ -6185,13 +6263,49 @@
               </a:spcAft>
             </a:pPr>
             <a:r>
-              <a:rPr sz="1600" b="0" i="0">
-                <a:solidFill>
-                  <a:srgbClr val="333333"/>
-                </a:solidFill>
-                <a:latin typeface="Calibri"/>
-              </a:rPr>
-              <a:t>/proc/cpuinfo — CPU details</a:t>
+              <a:rPr sz="1600" b="0" i="0" dirty="0">
+                <a:solidFill>
+                  <a:srgbClr val="333333"/>
+                </a:solidFill>
+                <a:latin typeface="Calibri"/>
+              </a:rPr>
+              <a:t>/proc/</a:t>
+            </a:r>
+            <a:r>
+              <a:rPr sz="1600" b="0" i="0" dirty="0" err="1">
+                <a:solidFill>
+                  <a:srgbClr val="333333"/>
+                </a:solidFill>
+                <a:latin typeface="Calibri"/>
+              </a:rPr>
+              <a:t>cpuinfo</a:t>
+            </a:r>
+            <a:r>
+              <a:rPr sz="1600" b="0" i="0" dirty="0">
+                <a:solidFill>
+                  <a:srgbClr val="333333"/>
+                </a:solidFill>
+                <a:latin typeface="Calibri"/>
+              </a:rPr>
+              <a:t> </a:t>
+            </a:r>
+            <a:r>
+              <a:rPr lang="en-IN" sz="1600" b="0" i="0" dirty="0">
+                <a:solidFill>
+                  <a:srgbClr val="333333"/>
+                </a:solidFill>
+                <a:latin typeface="Calibri"/>
+              </a:rPr>
+              <a:t>-</a:t>
+            </a:r>
+            <a:r>
+              <a:rPr sz="1600" b="0" i="0" dirty="0">
+                <a:solidFill>
+                  <a:srgbClr val="333333"/>
+                </a:solidFill>
+                <a:latin typeface="Calibri"/>
+              </a:rPr>
+              <a:t> CPU details</a:t>
             </a:r>
           </a:p>
           <a:p>
@@ -6201,13 +6315,49 @@
               </a:spcAft>
             </a:pPr>
             <a:r>
-              <a:rPr sz="1600" b="0" i="0">
-                <a:solidFill>
-                  <a:srgbClr val="333333"/>
-                </a:solidFill>
-                <a:latin typeface="Calibri"/>
-              </a:rPr>
-              <a:t>/proc/meminfo — memory</a:t>
+              <a:rPr sz="1600" b="0" i="0" dirty="0">
+                <a:solidFill>
+                  <a:srgbClr val="333333"/>
+                </a:solidFill>
+                <a:latin typeface="Calibri"/>
+              </a:rPr>
+              <a:t>/proc/</a:t>
+            </a:r>
+            <a:r>
+              <a:rPr sz="1600" b="0" i="0" dirty="0" err="1">
+                <a:solidFill>
+                  <a:srgbClr val="333333"/>
+                </a:solidFill>
+                <a:latin typeface="Calibri"/>
+              </a:rPr>
+              <a:t>meminfo</a:t>
+            </a:r>
+            <a:r>
+              <a:rPr sz="1600" b="0" i="0" dirty="0">
+                <a:solidFill>
+                  <a:srgbClr val="333333"/>
+                </a:solidFill>
+                <a:latin typeface="Calibri"/>
+              </a:rPr>
+              <a:t> </a:t>
+            </a:r>
+            <a:r>
+              <a:rPr lang="en-IN" sz="1600" b="0" i="0" dirty="0">
+                <a:solidFill>
+                  <a:srgbClr val="333333"/>
+                </a:solidFill>
+                <a:latin typeface="Calibri"/>
+              </a:rPr>
+              <a:t>-</a:t>
+            </a:r>
+            <a:r>
+              <a:rPr sz="1600" b="0" i="0" dirty="0">
+                <a:solidFill>
+                  <a:srgbClr val="333333"/>
+                </a:solidFill>
+                <a:latin typeface="Calibri"/>
+              </a:rPr>
+              <a:t> memory</a:t>
             </a:r>
           </a:p>
           <a:p>
@@ -6217,13 +6367,49 @@
               </a:spcAft>
             </a:pPr>
             <a:r>
-              <a:rPr sz="1600" b="0" i="0">
-                <a:solidFill>
-                  <a:srgbClr val="333333"/>
-                </a:solidFill>
-                <a:latin typeface="Calibri"/>
-              </a:rPr>
-              <a:t>/proc/&lt;pid&gt;/ — per-process</a:t>
+              <a:rPr sz="1600" b="0" i="0" dirty="0">
+                <a:solidFill>
+                  <a:srgbClr val="333333"/>
+                </a:solidFill>
+                <a:latin typeface="Calibri"/>
+              </a:rPr>
+              <a:t>/proc/&lt;</a:t>
+            </a:r>
+            <a:r>
+              <a:rPr sz="1600" b="0" i="0" dirty="0" err="1">
+                <a:solidFill>
+                  <a:srgbClr val="333333"/>
+                </a:solidFill>
+                <a:latin typeface="Calibri"/>
+              </a:rPr>
+              <a:t>pid</a:t>
+            </a:r>
+            <a:r>
+              <a:rPr sz="1600" b="0" i="0" dirty="0">
+                <a:solidFill>
+                  <a:srgbClr val="333333"/>
+                </a:solidFill>
+                <a:latin typeface="Calibri"/>
+              </a:rPr>
+              <a:t>&gt;/ </a:t>
+            </a:r>
+            <a:r>
+              <a:rPr lang="en-IN" sz="1600" b="0" i="0" dirty="0">
+                <a:solidFill>
+                  <a:srgbClr val="333333"/>
+                </a:solidFill>
+                <a:latin typeface="Calibri"/>
+              </a:rPr>
+              <a:t>-</a:t>
+            </a:r>
+            <a:r>
+              <a:rPr sz="1600" b="0" i="0" dirty="0">
+                <a:solidFill>
+                  <a:srgbClr val="333333"/>
+                </a:solidFill>
+                <a:latin typeface="Calibri"/>
+              </a:rPr>
+              <a:t> per-process</a:t>
             </a:r>
           </a:p>
           <a:p>
@@ -6233,38 +6419,60 @@
               </a:spcAft>
             </a:pPr>
             <a:r>
-              <a:rPr sz="1600" b="0" i="0">
-                <a:solidFill>
-                  <a:srgbClr val="333333"/>
-                </a:solidFill>
-                <a:latin typeface="Calibri"/>
-              </a:rPr>
-              <a:t>/proc/cmdline — kernel args</a:t>
-            </a:r>
-          </a:p>
-          <a:p>
-            <a:pPr>
-              <a:spcAft>
-                <a:spcPts val="400"/>
-              </a:spcAft>
-            </a:pPr>
-            <a:r>
-              <a:rPr sz="1600" b="0" i="0">
-                <a:solidFill>
-                  <a:srgbClr val="333333"/>
-                </a:solidFill>
-                <a:latin typeface="Calibri"/>
-              </a:rPr>
-              <a:t>/proc/config.gz — kernel config</a:t>
-            </a:r>
-          </a:p>
-          <a:p>
-            <a:pPr>
-              <a:spcAft>
-                <a:spcPts val="400"/>
-              </a:spcAft>
-            </a:pPr>
-            <a:endParaRPr sz="1600" b="0" i="0">
+              <a:rPr sz="1600" b="0" i="0" dirty="0">
+                <a:solidFill>
+                  <a:srgbClr val="333333"/>
+                </a:solidFill>
+                <a:latin typeface="Calibri"/>
+              </a:rPr>
+              <a:t>/proc/</a:t>
+            </a:r>
+            <a:r>
+              <a:rPr sz="1600" b="0" i="0" dirty="0" err="1">
+                <a:solidFill>
+                  <a:srgbClr val="333333"/>
+                </a:solidFill>
+                <a:latin typeface="Calibri"/>
+              </a:rPr>
+              <a:t>cmdline</a:t>
+            </a:r>
+            <a:r>
+              <a:rPr sz="1600" b="0" i="0" dirty="0">
+                <a:solidFill>
+                  <a:srgbClr val="333333"/>
+                </a:solidFill>
+                <a:latin typeface="Calibri"/>
+              </a:rPr>
+              <a:t> </a:t>
+            </a:r>
+            <a:r>
+              <a:rPr lang="en-IN" sz="1600" b="0" i="0" dirty="0">
+                <a:solidFill>
+                  <a:srgbClr val="333333"/>
+                </a:solidFill>
+                <a:latin typeface="Calibri"/>
+              </a:rPr>
+              <a:t>-</a:t>
+            </a:r>
+            <a:r>
+              <a:rPr sz="1600" b="0" i="0" dirty="0">
+                <a:solidFill>
+                  <a:srgbClr val="333333"/>
+                </a:solidFill>
+                <a:latin typeface="Calibri"/>
+              </a:rPr>
+              <a:t> kernel </a:t>
+            </a:r>
+            <a:r>
+              <a:rPr sz="1600" b="0" i="0" dirty="0" err="1">
+                <a:solidFill>
+                  <a:srgbClr val="333333"/>
+                </a:solidFill>
+                <a:latin typeface="Calibri"/>
+              </a:rPr>
+              <a:t>args</a:t>
+            </a:r>
+            <a:endParaRPr sz="1600" b="0" i="0" dirty="0">
               <a:solidFill>
                 <a:srgbClr val="333333"/>
               </a:solidFill>
@@ -6278,7 +6486,54 @@
               </a:spcAft>
             </a:pPr>
             <a:r>
-              <a:rPr sz="1600" b="0" i="0">
+              <a:rPr sz="1600" b="0" i="0" dirty="0">
+                <a:solidFill>
+                  <a:srgbClr val="333333"/>
+                </a:solidFill>
+                <a:latin typeface="Calibri"/>
+              </a:rPr>
+              <a:t>/proc/config.gz </a:t>
+            </a:r>
+            <a:r>
+              <a:rPr lang="en-IN" sz="1600" b="0" i="0" dirty="0">
+                <a:solidFill>
+                  <a:srgbClr val="333333"/>
+                </a:solidFill>
+                <a:latin typeface="Calibri"/>
+              </a:rPr>
+              <a:t>-</a:t>
+            </a:r>
+            <a:r>
+              <a:rPr sz="1600" b="0" i="0" dirty="0">
+                <a:solidFill>
+                  <a:srgbClr val="333333"/>
+                </a:solidFill>
+                <a:latin typeface="Calibri"/>
+              </a:rPr>
+              <a:t> kernel config</a:t>
+            </a:r>
+          </a:p>
+          <a:p>
+            <a:pPr>
+              <a:spcAft>
+                <a:spcPts val="400"/>
+              </a:spcAft>
+            </a:pPr>
+            <a:endParaRPr sz="1600" b="0" i="0" dirty="0">
+              <a:solidFill>
+                <a:srgbClr val="333333"/>
+              </a:solidFill>
+              <a:latin typeface="Calibri"/>
+            </a:endParaRPr>
+          </a:p>
+          <a:p>
+            <a:pPr>
+              <a:spcAft>
+                <a:spcPts val="400"/>
+              </a:spcAft>
+            </a:pPr>
+            <a:r>
+              <a:rPr sz="1600" b="0" i="0" dirty="0">
                 <a:solidFill>
                   <a:srgbClr val="333333"/>
                 </a:solidFill>
@@ -6428,7 +6683,7 @@
               </a:spcAft>
             </a:pPr>
             <a:r>
-              <a:rPr b="1" i="0">
+              <a:rPr b="1" i="0" dirty="0">
                 <a:solidFill>
                   <a:srgbClr val="663399"/>
                 </a:solidFill>
@@ -6443,7 +6698,7 @@
                 <a:spcPts val="400"/>
               </a:spcAft>
             </a:pPr>
-            <a:endParaRPr b="1" i="0">
+            <a:endParaRPr b="1" i="0" dirty="0">
               <a:solidFill>
                 <a:srgbClr val="663399"/>
               </a:solidFill>
@@ -6457,13 +6712,49 @@
               </a:spcAft>
             </a:pPr>
             <a:r>
-              <a:rPr sz="1600" b="0" i="0">
-                <a:solidFill>
-                  <a:srgbClr val="333333"/>
-                </a:solidFill>
-                <a:latin typeface="Calibri"/>
-              </a:rPr>
-              <a:t>/sys/class/leds/ — LEDs</a:t>
+              <a:rPr sz="1600" b="0" i="0" dirty="0">
+                <a:solidFill>
+                  <a:srgbClr val="333333"/>
+                </a:solidFill>
+                <a:latin typeface="Calibri"/>
+              </a:rPr>
+              <a:t>/sys/class/</a:t>
+            </a:r>
+            <a:r>
+              <a:rPr sz="1600" b="0" i="0" dirty="0" err="1">
+                <a:solidFill>
+                  <a:srgbClr val="333333"/>
+                </a:solidFill>
+                <a:latin typeface="Calibri"/>
+              </a:rPr>
+              <a:t>leds</a:t>
+            </a:r>
+            <a:r>
+              <a:rPr sz="1600" b="0" i="0" dirty="0">
+                <a:solidFill>
+                  <a:srgbClr val="333333"/>
+                </a:solidFill>
+                <a:latin typeface="Calibri"/>
+              </a:rPr>
+              <a:t>/ </a:t>
+            </a:r>
+            <a:r>
+              <a:rPr lang="en-IN" sz="1600" b="0" i="0" dirty="0">
+                <a:solidFill>
+                  <a:srgbClr val="333333"/>
+                </a:solidFill>
+                <a:latin typeface="Calibri"/>
+              </a:rPr>
+              <a:t>-</a:t>
+            </a:r>
+            <a:r>
+              <a:rPr sz="1600" b="0" i="0" dirty="0">
+                <a:solidFill>
+                  <a:srgbClr val="333333"/>
+                </a:solidFill>
+                <a:latin typeface="Calibri"/>
+              </a:rPr>
+              <a:t> LEDs</a:t>
             </a:r>
           </a:p>
           <a:p>
@@ -6473,13 +6764,49 @@
               </a:spcAft>
             </a:pPr>
             <a:r>
-              <a:rPr sz="1600" b="0" i="0">
-                <a:solidFill>
-                  <a:srgbClr val="333333"/>
-                </a:solidFill>
-                <a:latin typeface="Calibri"/>
-              </a:rPr>
-              <a:t>/sys/class/gpio/ — GPIOs</a:t>
+              <a:rPr sz="1600" b="0" i="0" dirty="0">
+                <a:solidFill>
+                  <a:srgbClr val="333333"/>
+                </a:solidFill>
+                <a:latin typeface="Calibri"/>
+              </a:rPr>
+              <a:t>/sys/class/</a:t>
+            </a:r>
+            <a:r>
+              <a:rPr sz="1600" b="0" i="0" dirty="0" err="1">
+                <a:solidFill>
+                  <a:srgbClr val="333333"/>
+                </a:solidFill>
+                <a:latin typeface="Calibri"/>
+              </a:rPr>
+              <a:t>gpio</a:t>
+            </a:r>
+            <a:r>
+              <a:rPr sz="1600" b="0" i="0" dirty="0">
+                <a:solidFill>
+                  <a:srgbClr val="333333"/>
+                </a:solidFill>
+                <a:latin typeface="Calibri"/>
+              </a:rPr>
+              <a:t>/ </a:t>
+            </a:r>
+            <a:r>
+              <a:rPr lang="en-IN" sz="1600" b="0" i="0" dirty="0">
+                <a:solidFill>
+                  <a:srgbClr val="333333"/>
+                </a:solidFill>
+                <a:latin typeface="Calibri"/>
+              </a:rPr>
+              <a:t>-</a:t>
+            </a:r>
+            <a:r>
+              <a:rPr sz="1600" b="0" i="0" dirty="0">
+                <a:solidFill>
+                  <a:srgbClr val="333333"/>
+                </a:solidFill>
+                <a:latin typeface="Calibri"/>
+              </a:rPr>
+              <a:t> GPIOs</a:t>
             </a:r>
           </a:p>
           <a:p>
@@ -6489,13 +6816,49 @@
               </a:spcAft>
             </a:pPr>
             <a:r>
-              <a:rPr sz="1600" b="0" i="0">
-                <a:solidFill>
-                  <a:srgbClr val="333333"/>
-                </a:solidFill>
-                <a:latin typeface="Calibri"/>
-              </a:rPr>
-              <a:t>/sys/class/tty/ — serial</a:t>
+              <a:rPr sz="1600" b="0" i="0" dirty="0">
+                <a:solidFill>
+                  <a:srgbClr val="333333"/>
+                </a:solidFill>
+                <a:latin typeface="Calibri"/>
+              </a:rPr>
+              <a:t>/sys/class/</a:t>
+            </a:r>
+            <a:r>
+              <a:rPr sz="1600" b="0" i="0" dirty="0" err="1">
+                <a:solidFill>
+                  <a:srgbClr val="333333"/>
+                </a:solidFill>
+                <a:latin typeface="Calibri"/>
+              </a:rPr>
+              <a:t>tty</a:t>
+            </a:r>
+            <a:r>
+              <a:rPr sz="1600" b="0" i="0" dirty="0">
+                <a:solidFill>
+                  <a:srgbClr val="333333"/>
+                </a:solidFill>
+                <a:latin typeface="Calibri"/>
+              </a:rPr>
+              <a:t>/ </a:t>
+            </a:r>
+            <a:r>
+              <a:rPr lang="en-IN" sz="1600" b="0" i="0" dirty="0">
+                <a:solidFill>
+                  <a:srgbClr val="333333"/>
+                </a:solidFill>
+                <a:latin typeface="Calibri"/>
+              </a:rPr>
+              <a:t>-</a:t>
+            </a:r>
+            <a:r>
+              <a:rPr sz="1600" b="0" i="0" dirty="0">
+                <a:solidFill>
+                  <a:srgbClr val="333333"/>
+                </a:solidFill>
+                <a:latin typeface="Calibri"/>
+              </a:rPr>
+              <a:t> serial</a:t>
             </a:r>
           </a:p>
           <a:p>
@@ -6505,13 +6868,49 @@
               </a:spcAft>
             </a:pPr>
             <a:r>
-              <a:rPr sz="1600" b="0" i="0">
-                <a:solidFill>
-                  <a:srgbClr val="333333"/>
-                </a:solidFill>
-                <a:latin typeface="Calibri"/>
-              </a:rPr>
-              <a:t>/sys/firmware/devicetree/ — DT</a:t>
+              <a:rPr sz="1600" b="0" i="0" dirty="0">
+                <a:solidFill>
+                  <a:srgbClr val="333333"/>
+                </a:solidFill>
+                <a:latin typeface="Calibri"/>
+              </a:rPr>
+              <a:t>/sys/firmware/</a:t>
+            </a:r>
+            <a:r>
+              <a:rPr sz="1600" b="0" i="0" dirty="0" err="1">
+                <a:solidFill>
+                  <a:srgbClr val="333333"/>
+                </a:solidFill>
+                <a:latin typeface="Calibri"/>
+              </a:rPr>
+              <a:t>devicetree</a:t>
+            </a:r>
+            <a:r>
+              <a:rPr sz="1600" b="0" i="0" dirty="0">
+                <a:solidFill>
+                  <a:srgbClr val="333333"/>
+                </a:solidFill>
+                <a:latin typeface="Calibri"/>
+              </a:rPr>
+              <a:t>/ </a:t>
+            </a:r>
+            <a:r>
+              <a:rPr lang="en-IN" sz="1600" b="0" i="0" dirty="0">
+                <a:solidFill>
+                  <a:srgbClr val="333333"/>
+                </a:solidFill>
+                <a:latin typeface="Calibri"/>
+              </a:rPr>
+              <a:t>-</a:t>
+            </a:r>
+            <a:r>
+              <a:rPr sz="1600" b="0" i="0" dirty="0">
+                <a:solidFill>
+                  <a:srgbClr val="333333"/>
+                </a:solidFill>
+                <a:latin typeface="Calibri"/>
+              </a:rPr>
+              <a:t> DT</a:t>
             </a:r>
           </a:p>
           <a:p>
@@ -6520,7 +6919,7 @@
                 <a:spcPts val="400"/>
               </a:spcAft>
             </a:pPr>
-            <a:endParaRPr sz="1600" b="0" i="0">
+            <a:endParaRPr sz="1600" b="0" i="0" dirty="0">
               <a:solidFill>
                 <a:srgbClr val="333333"/>
               </a:solidFill>
@@ -6534,7 +6933,7 @@
               </a:spcAft>
             </a:pPr>
             <a:r>
-              <a:rPr sz="1600" b="0" i="0">
+              <a:rPr sz="1600" b="0" i="0" dirty="0">
                 <a:solidFill>
                   <a:srgbClr val="333333"/>
                 </a:solidFill>
@@ -6684,7 +7083,7 @@
               </a:spcAft>
             </a:pPr>
             <a:r>
-              <a:rPr b="1" i="0">
+              <a:rPr b="1" i="0" dirty="0">
                 <a:solidFill>
                   <a:srgbClr val="CC0066"/>
                 </a:solidFill>
@@ -6699,7 +7098,7 @@
                 <a:spcPts val="400"/>
               </a:spcAft>
             </a:pPr>
-            <a:endParaRPr b="1" i="0">
+            <a:endParaRPr b="1" i="0" dirty="0">
               <a:solidFill>
                 <a:srgbClr val="CC0066"/>
               </a:solidFill>
@@ -6713,13 +7112,31 @@
               </a:spcAft>
             </a:pPr>
             <a:r>
-              <a:rPr sz="1600" b="0" i="0">
-                <a:solidFill>
-                  <a:srgbClr val="333333"/>
-                </a:solidFill>
-                <a:latin typeface="Calibri"/>
-              </a:rPr>
-              <a:t>/dev/ttyS0 — serial port</a:t>
+              <a:rPr sz="1600" b="0" i="0" dirty="0">
+                <a:solidFill>
+                  <a:srgbClr val="333333"/>
+                </a:solidFill>
+                <a:latin typeface="Calibri"/>
+              </a:rPr>
+              <a:t>/dev/ttyS0 </a:t>
+            </a:r>
+            <a:r>
+              <a:rPr lang="en-IN" sz="1600" b="0" i="0" dirty="0">
+                <a:solidFill>
+                  <a:srgbClr val="333333"/>
+                </a:solidFill>
+                <a:latin typeface="Calibri"/>
+              </a:rPr>
+              <a:t>-</a:t>
+            </a:r>
+            <a:r>
+              <a:rPr sz="1600" b="0" i="0" dirty="0">
+                <a:solidFill>
+                  <a:srgbClr val="333333"/>
+                </a:solidFill>
+                <a:latin typeface="Calibri"/>
+              </a:rPr>
+              <a:t> serial port</a:t>
             </a:r>
           </a:p>
           <a:p>
@@ -6729,13 +7146,49 @@
               </a:spcAft>
             </a:pPr>
             <a:r>
-              <a:rPr sz="1600" b="0" i="0">
-                <a:solidFill>
-                  <a:srgbClr val="333333"/>
-                </a:solidFill>
-                <a:latin typeface="Calibri"/>
-              </a:rPr>
-              <a:t>/dev/sda — disk</a:t>
+              <a:rPr sz="1600" b="0" i="0" dirty="0">
+                <a:solidFill>
+                  <a:srgbClr val="333333"/>
+                </a:solidFill>
+                <a:latin typeface="Calibri"/>
+              </a:rPr>
+              <a:t>/dev/</a:t>
+            </a:r>
+            <a:r>
+              <a:rPr sz="1600" b="0" i="0" dirty="0" err="1">
+                <a:solidFill>
+                  <a:srgbClr val="333333"/>
+                </a:solidFill>
+                <a:latin typeface="Calibri"/>
+              </a:rPr>
+              <a:t>sda</a:t>
+            </a:r>
+            <a:r>
+              <a:rPr sz="1600" b="0" i="0" dirty="0">
+                <a:solidFill>
+                  <a:srgbClr val="333333"/>
+                </a:solidFill>
+                <a:latin typeface="Calibri"/>
+              </a:rPr>
+              <a:t> </a:t>
+            </a:r>
+            <a:r>
+              <a:rPr lang="en-IN" sz="1600" b="0" i="0" dirty="0">
+                <a:solidFill>
+                  <a:srgbClr val="333333"/>
+                </a:solidFill>
+                <a:latin typeface="Calibri"/>
+              </a:rPr>
+              <a:t>-</a:t>
+            </a:r>
+            <a:r>
+              <a:rPr sz="1600" b="0" i="0" dirty="0">
+                <a:solidFill>
+                  <a:srgbClr val="333333"/>
+                </a:solidFill>
+                <a:latin typeface="Calibri"/>
+              </a:rPr>
+              <a:t> disk</a:t>
             </a:r>
           </a:p>
           <a:p>
@@ -6745,13 +7198,31 @@
               </a:spcAft>
             </a:pPr>
             <a:r>
-              <a:rPr sz="1600" b="0" i="0">
-                <a:solidFill>
-                  <a:srgbClr val="333333"/>
-                </a:solidFill>
-                <a:latin typeface="Calibri"/>
-              </a:rPr>
-              <a:t>/dev/mmcblk0 — eMMC/SD</a:t>
+              <a:rPr sz="1600" b="0" i="0" dirty="0">
+                <a:solidFill>
+                  <a:srgbClr val="333333"/>
+                </a:solidFill>
+                <a:latin typeface="Calibri"/>
+              </a:rPr>
+              <a:t>/dev/mmcblk0 </a:t>
+            </a:r>
+            <a:r>
+              <a:rPr lang="en-IN" sz="1600" b="0" i="0" dirty="0">
+                <a:solidFill>
+                  <a:srgbClr val="333333"/>
+                </a:solidFill>
+                <a:latin typeface="Calibri"/>
+              </a:rPr>
+              <a:t>-</a:t>
+            </a:r>
+            <a:r>
+              <a:rPr sz="1600" b="0" i="0" dirty="0">
+                <a:solidFill>
+                  <a:srgbClr val="333333"/>
+                </a:solidFill>
+                <a:latin typeface="Calibri"/>
+              </a:rPr>
+              <a:t> eMMC/SD</a:t>
             </a:r>
           </a:p>
           <a:p>
@@ -6761,13 +7232,31 @@
               </a:spcAft>
             </a:pPr>
             <a:r>
-              <a:rPr sz="1600" b="0" i="0">
-                <a:solidFill>
-                  <a:srgbClr val="333333"/>
-                </a:solidFill>
-                <a:latin typeface="Calibri"/>
-              </a:rPr>
-              <a:t>/dev/null — sink</a:t>
+              <a:rPr sz="1600" b="0" i="0" dirty="0">
+                <a:solidFill>
+                  <a:srgbClr val="333333"/>
+                </a:solidFill>
+                <a:latin typeface="Calibri"/>
+              </a:rPr>
+              <a:t>/dev/null </a:t>
+            </a:r>
+            <a:r>
+              <a:rPr lang="en-IN" sz="1600" b="0" i="0" dirty="0">
+                <a:solidFill>
+                  <a:srgbClr val="333333"/>
+                </a:solidFill>
+                <a:latin typeface="Calibri"/>
+              </a:rPr>
+              <a:t>-</a:t>
+            </a:r>
+            <a:r>
+              <a:rPr sz="1600" b="0" i="0" dirty="0">
+                <a:solidFill>
+                  <a:srgbClr val="333333"/>
+                </a:solidFill>
+                <a:latin typeface="Calibri"/>
+              </a:rPr>
+              <a:t> sink</a:t>
             </a:r>
           </a:p>
           <a:p>
@@ -6776,7 +7265,7 @@
                 <a:spcPts val="400"/>
               </a:spcAft>
             </a:pPr>
-            <a:endParaRPr sz="1600" b="0" i="0">
+            <a:endParaRPr sz="1600" b="0" i="0" dirty="0">
               <a:solidFill>
                 <a:srgbClr val="333333"/>
               </a:solidFill>
@@ -6790,13 +7279,49 @@
               </a:spcAft>
             </a:pPr>
             <a:r>
-              <a:rPr sz="1600" b="0" i="0">
-                <a:solidFill>
-                  <a:srgbClr val="333333"/>
-                </a:solidFill>
-                <a:latin typeface="Calibri"/>
-              </a:rPr>
-              <a:t>Created by udev (or devtmpfs)</a:t>
+              <a:rPr sz="1600" b="0" i="0" dirty="0">
+                <a:solidFill>
+                  <a:srgbClr val="333333"/>
+                </a:solidFill>
+                <a:latin typeface="Calibri"/>
+              </a:rPr>
+              <a:t>Created by </a:t>
+            </a:r>
+            <a:r>
+              <a:rPr sz="1600" b="0" i="0" dirty="0" err="1">
+                <a:solidFill>
+                  <a:srgbClr val="333333"/>
+                </a:solidFill>
+                <a:latin typeface="Calibri"/>
+              </a:rPr>
+              <a:t>udev</a:t>
+            </a:r>
+            <a:r>
+              <a:rPr sz="1600" b="0" i="0" dirty="0">
+                <a:solidFill>
+                  <a:srgbClr val="333333"/>
+                </a:solidFill>
+                <a:latin typeface="Calibri"/>
+              </a:rPr>
+              <a:t> (or </a:t>
+            </a:r>
+            <a:r>
+              <a:rPr sz="1600" b="0" i="0" dirty="0" err="1">
+                <a:solidFill>
+                  <a:srgbClr val="333333"/>
+                </a:solidFill>
+                <a:latin typeface="Calibri"/>
+              </a:rPr>
+              <a:t>devtmpfs</a:t>
+            </a:r>
+            <a:r>
+              <a:rPr sz="1600" b="0" i="0" dirty="0">
+                <a:solidFill>
+                  <a:srgbClr val="333333"/>
+                </a:solidFill>
+                <a:latin typeface="Calibri"/>
+              </a:rPr>
+              <a:t>)</a:t>
             </a:r>
           </a:p>
         </p:txBody>
@@ -7576,7 +8101,19 @@
               <a:rPr sz="3200" b="1" dirty="0">
                 <a:latin typeface="Calibri"/>
               </a:rPr>
-              <a:t>Capabilities — Finer Than Root</a:t>
+              <a:t>Capabilities</a:t>
+            </a:r>
+            <a:r>
+              <a:rPr lang="en-IN" sz="3200" b="1" dirty="0">
+                <a:latin typeface="Calibri"/>
+              </a:rPr>
+              <a:t>:</a:t>
+            </a:r>
+            <a:r>
+              <a:rPr sz="3200" b="1" dirty="0">
+                <a:latin typeface="Calibri"/>
+              </a:rPr>
+              <a:t> Finer Than Root</a:t>
             </a:r>
           </a:p>
         </p:txBody>
@@ -7943,7 +8480,7 @@
               </a:spcAft>
             </a:pPr>
             <a:r>
-              <a:rPr b="1" i="0">
+              <a:rPr b="1" i="0" dirty="0">
                 <a:solidFill>
                   <a:srgbClr val="333333"/>
                 </a:solidFill>
@@ -7959,7 +8496,7 @@
               </a:spcAft>
             </a:pPr>
             <a:r>
-              <a:rPr b="0" i="0">
+              <a:rPr b="0" i="0" dirty="0">
                 <a:solidFill>
                   <a:srgbClr val="333333"/>
                 </a:solidFill>
@@ -7975,7 +8512,7 @@
               </a:spcAft>
             </a:pPr>
             <a:r>
-              <a:rPr b="1" i="0">
+              <a:rPr b="1" i="0" dirty="0">
                 <a:solidFill>
                   <a:srgbClr val="333333"/>
                 </a:solidFill>
@@ -7991,13 +8528,31 @@
               </a:spcAft>
             </a:pPr>
             <a:r>
-              <a:rPr sz="1600" b="0" i="0">
-                <a:solidFill>
-                  <a:srgbClr val="333333"/>
-                </a:solidFill>
-                <a:latin typeface="Calibri"/>
-              </a:rPr>
-              <a:t>  CAP_NET_BIND_SERVICE — low ports</a:t>
+              <a:rPr sz="1600" b="0" i="0" dirty="0">
+                <a:solidFill>
+                  <a:srgbClr val="333333"/>
+                </a:solidFill>
+                <a:latin typeface="Calibri"/>
+              </a:rPr>
+              <a:t>  CAP_NET_BIND_SERVICE </a:t>
+            </a:r>
+            <a:r>
+              <a:rPr lang="en-IN" sz="1600" b="0" i="0" dirty="0">
+                <a:solidFill>
+                  <a:srgbClr val="333333"/>
+                </a:solidFill>
+                <a:latin typeface="Calibri"/>
+              </a:rPr>
+              <a:t>-</a:t>
+            </a:r>
+            <a:r>
+              <a:rPr sz="1600" b="0" i="0" dirty="0">
+                <a:solidFill>
+                  <a:srgbClr val="333333"/>
+                </a:solidFill>
+                <a:latin typeface="Calibri"/>
+              </a:rPr>
+              <a:t> low ports</a:t>
             </a:r>
           </a:p>
           <a:p>
@@ -8007,13 +8562,31 @@
               </a:spcAft>
             </a:pPr>
             <a:r>
-              <a:rPr sz="1600" b="0" i="0">
-                <a:solidFill>
-                  <a:srgbClr val="333333"/>
-                </a:solidFill>
-                <a:latin typeface="Calibri"/>
-              </a:rPr>
-              <a:t>  CAP_NET_RAW — raw sockets</a:t>
+              <a:rPr sz="1600" b="0" i="0" dirty="0">
+                <a:solidFill>
+                  <a:srgbClr val="333333"/>
+                </a:solidFill>
+                <a:latin typeface="Calibri"/>
+              </a:rPr>
+              <a:t>  CAP_NET_RAW </a:t>
+            </a:r>
+            <a:r>
+              <a:rPr lang="en-IN" sz="1600" b="0" i="0" dirty="0">
+                <a:solidFill>
+                  <a:srgbClr val="333333"/>
+                </a:solidFill>
+                <a:latin typeface="Calibri"/>
+              </a:rPr>
+              <a:t>-</a:t>
+            </a:r>
+            <a:r>
+              <a:rPr sz="1600" b="0" i="0" dirty="0">
+                <a:solidFill>
+                  <a:srgbClr val="333333"/>
+                </a:solidFill>
+                <a:latin typeface="Calibri"/>
+              </a:rPr>
+              <a:t> raw sockets</a:t>
             </a:r>
           </a:p>
           <a:p>
@@ -8023,13 +8596,31 @@
               </a:spcAft>
             </a:pPr>
             <a:r>
-              <a:rPr sz="1600" b="0" i="0">
-                <a:solidFill>
-                  <a:srgbClr val="333333"/>
-                </a:solidFill>
-                <a:latin typeface="Calibri"/>
-              </a:rPr>
-              <a:t>  CAP_SYS_TIME — set clock</a:t>
+              <a:rPr sz="1600" b="0" i="0" dirty="0">
+                <a:solidFill>
+                  <a:srgbClr val="333333"/>
+                </a:solidFill>
+                <a:latin typeface="Calibri"/>
+              </a:rPr>
+              <a:t>  CAP_SYS_TIME </a:t>
+            </a:r>
+            <a:r>
+              <a:rPr lang="en-IN" sz="1600" b="0" i="0" dirty="0">
+                <a:solidFill>
+                  <a:srgbClr val="333333"/>
+                </a:solidFill>
+                <a:latin typeface="Calibri"/>
+              </a:rPr>
+              <a:t>-</a:t>
+            </a:r>
+            <a:r>
+              <a:rPr sz="1600" b="0" i="0" dirty="0">
+                <a:solidFill>
+                  <a:srgbClr val="333333"/>
+                </a:solidFill>
+                <a:latin typeface="Calibri"/>
+              </a:rPr>
+              <a:t> set clock</a:t>
             </a:r>
           </a:p>
           <a:p>
@@ -8039,13 +8630,31 @@
               </a:spcAft>
             </a:pPr>
             <a:r>
-              <a:rPr sz="1600" b="0" i="0">
-                <a:solidFill>
-                  <a:srgbClr val="333333"/>
-                </a:solidFill>
-                <a:latin typeface="Calibri"/>
-              </a:rPr>
-              <a:t>  CAP_DAC_OVERRIDE — bypass perms</a:t>
+              <a:rPr sz="1600" b="0" i="0" dirty="0">
+                <a:solidFill>
+                  <a:srgbClr val="333333"/>
+                </a:solidFill>
+                <a:latin typeface="Calibri"/>
+              </a:rPr>
+              <a:t>  CAP_DAC_OVERRIDE </a:t>
+            </a:r>
+            <a:r>
+              <a:rPr lang="en-IN" sz="1600" b="0" i="0" dirty="0">
+                <a:solidFill>
+                  <a:srgbClr val="333333"/>
+                </a:solidFill>
+                <a:latin typeface="Calibri"/>
+              </a:rPr>
+              <a:t>-</a:t>
+            </a:r>
+            <a:r>
+              <a:rPr sz="1600" b="0" i="0" dirty="0">
+                <a:solidFill>
+                  <a:srgbClr val="333333"/>
+                </a:solidFill>
+                <a:latin typeface="Calibri"/>
+              </a:rPr>
+              <a:t> bypass perms</a:t>
             </a:r>
           </a:p>
           <a:p>
@@ -8055,7 +8664,7 @@
               </a:spcAft>
             </a:pPr>
             <a:r>
-              <a:rPr b="1" i="0">
+              <a:rPr b="1" i="0" dirty="0">
                 <a:solidFill>
                   <a:srgbClr val="663399"/>
                 </a:solidFill>
@@ -8231,7 +8840,7 @@
               </a:spcAft>
             </a:pPr>
             <a:r>
-              <a:rPr sz="2000" b="1" i="0">
+              <a:rPr sz="2000" b="1" i="0" dirty="0">
                 <a:solidFill>
                   <a:srgbClr val="CC0066"/>
                 </a:solidFill>
@@ -8247,7 +8856,7 @@
               </a:spcAft>
             </a:pPr>
             <a:r>
-              <a:rPr sz="1600" b="0" i="0">
+              <a:rPr sz="1600" b="0" i="0" dirty="0">
                 <a:solidFill>
                   <a:srgbClr val="333333"/>
                 </a:solidFill>
@@ -8263,7 +8872,7 @@
               </a:spcAft>
             </a:pPr>
             <a:r>
-              <a:rPr sz="2000" b="1" i="0">
+              <a:rPr sz="2000" b="1" i="0" dirty="0">
                 <a:solidFill>
                   <a:srgbClr val="CC0066"/>
                 </a:solidFill>
@@ -8279,13 +8888,31 @@
               </a:spcAft>
             </a:pPr>
             <a:r>
-              <a:rPr sz="1600" b="0" i="0">
-                <a:solidFill>
-                  <a:srgbClr val="333333"/>
-                </a:solidFill>
-                <a:latin typeface="Calibri"/>
-              </a:rPr>
-              <a:t>SIGTERM (15) — polite ask to stop</a:t>
+              <a:rPr sz="1600" b="0" i="0" dirty="0">
+                <a:solidFill>
+                  <a:srgbClr val="333333"/>
+                </a:solidFill>
+                <a:latin typeface="Calibri"/>
+              </a:rPr>
+              <a:t>SIGTERM (15) </a:t>
+            </a:r>
+            <a:r>
+              <a:rPr lang="en-IN" sz="1600" b="0" i="0" dirty="0">
+                <a:solidFill>
+                  <a:srgbClr val="333333"/>
+                </a:solidFill>
+                <a:latin typeface="Calibri"/>
+              </a:rPr>
+              <a:t>-</a:t>
+            </a:r>
+            <a:r>
+              <a:rPr sz="1600" b="0" i="0" dirty="0">
+                <a:solidFill>
+                  <a:srgbClr val="333333"/>
+                </a:solidFill>
+                <a:latin typeface="Calibri"/>
+              </a:rPr>
+              <a:t> polite ask to stop</a:t>
             </a:r>
           </a:p>
           <a:p>
@@ -8295,13 +8922,31 @@
               </a:spcAft>
             </a:pPr>
             <a:r>
-              <a:rPr sz="1600" b="0" i="0">
-                <a:solidFill>
-                  <a:srgbClr val="333333"/>
-                </a:solidFill>
-                <a:latin typeface="Calibri"/>
-              </a:rPr>
-              <a:t>SIGKILL (9) — force terminate (kernel does it; process can't catch)</a:t>
+              <a:rPr sz="1600" b="0" i="0" dirty="0">
+                <a:solidFill>
+                  <a:srgbClr val="333333"/>
+                </a:solidFill>
+                <a:latin typeface="Calibri"/>
+              </a:rPr>
+              <a:t>SIGKILL (9) </a:t>
+            </a:r>
+            <a:r>
+              <a:rPr lang="en-IN" sz="1600" b="0" i="0" dirty="0">
+                <a:solidFill>
+                  <a:srgbClr val="333333"/>
+                </a:solidFill>
+                <a:latin typeface="Calibri"/>
+              </a:rPr>
+              <a:t>-</a:t>
+            </a:r>
+            <a:r>
+              <a:rPr sz="1600" b="0" i="0" dirty="0">
+                <a:solidFill>
+                  <a:srgbClr val="333333"/>
+                </a:solidFill>
+                <a:latin typeface="Calibri"/>
+              </a:rPr>
+              <a:t> force terminate (kernel does it; process can't catch)</a:t>
             </a:r>
           </a:p>
           <a:p>
@@ -8311,13 +8956,31 @@
               </a:spcAft>
             </a:pPr>
             <a:r>
-              <a:rPr sz="1600" b="0" i="0">
-                <a:solidFill>
-                  <a:srgbClr val="333333"/>
-                </a:solidFill>
-                <a:latin typeface="Calibri"/>
-              </a:rPr>
-              <a:t>SIGHUP (1) — reload config (convention)</a:t>
+              <a:rPr sz="1600" b="0" i="0" dirty="0">
+                <a:solidFill>
+                  <a:srgbClr val="333333"/>
+                </a:solidFill>
+                <a:latin typeface="Calibri"/>
+              </a:rPr>
+              <a:t>SIGHUP (1) </a:t>
+            </a:r>
+            <a:r>
+              <a:rPr lang="en-IN" sz="1600" b="0" i="0" dirty="0">
+                <a:solidFill>
+                  <a:srgbClr val="333333"/>
+                </a:solidFill>
+                <a:latin typeface="Calibri"/>
+              </a:rPr>
+              <a:t>-</a:t>
+            </a:r>
+            <a:r>
+              <a:rPr sz="1600" b="0" i="0" dirty="0">
+                <a:solidFill>
+                  <a:srgbClr val="333333"/>
+                </a:solidFill>
+                <a:latin typeface="Calibri"/>
+              </a:rPr>
+              <a:t> reload config (convention)</a:t>
             </a:r>
           </a:p>
           <a:p>
@@ -8327,7 +8990,7 @@
               </a:spcAft>
             </a:pPr>
             <a:r>
-              <a:rPr sz="2000" b="1" i="0">
+              <a:rPr sz="2000" b="1" i="0" dirty="0">
                 <a:solidFill>
                   <a:srgbClr val="CC0066"/>
                 </a:solidFill>
@@ -8343,7 +9006,7 @@
               </a:spcAft>
             </a:pPr>
             <a:r>
-              <a:rPr sz="1600" b="0" i="0">
+              <a:rPr sz="1600" b="0" i="0" dirty="0">
                 <a:solidFill>
                   <a:srgbClr val="333333"/>
                 </a:solidFill>
@@ -8359,7 +9022,7 @@
               </a:spcAft>
             </a:pPr>
             <a:r>
-              <a:rPr sz="1600" b="0" i="0">
+              <a:rPr sz="1600" b="0" i="0" dirty="0">
                 <a:solidFill>
                   <a:srgbClr val="333333"/>
                 </a:solidFill>
@@ -8917,7 +9580,19 @@
               <a:rPr sz="3200" b="1" dirty="0">
                 <a:latin typeface="Calibri"/>
               </a:rPr>
-              <a:t> — Why Embedded Cares</a:t>
+              <a:t> </a:t>
+            </a:r>
+            <a:r>
+              <a:rPr lang="en-IN" sz="3200" b="1" dirty="0">
+                <a:latin typeface="Calibri"/>
+              </a:rPr>
+              <a:t>-</a:t>
+            </a:r>
+            <a:r>
+              <a:rPr sz="3200" b="1" dirty="0">
+                <a:latin typeface="Calibri"/>
+              </a:rPr>
+              <a:t> Why Embedded Cares</a:t>
             </a:r>
           </a:p>
         </p:txBody>
@@ -9472,13 +10147,31 @@
           <a:p>
             <a:pPr algn="l"/>
             <a:r>
-              <a:rPr sz="1400" b="0" i="0">
-                <a:solidFill>
-                  <a:srgbClr val="333333"/>
-                </a:solidFill>
-                <a:latin typeface="Calibri"/>
-              </a:rPr>
-              <a:t>Same layout on every Linux — once you know it, you know it everywhere</a:t>
+              <a:rPr sz="1400" b="0" i="0" dirty="0">
+                <a:solidFill>
+                  <a:srgbClr val="333333"/>
+                </a:solidFill>
+                <a:latin typeface="Calibri"/>
+              </a:rPr>
+              <a:t>Same layout on every Linux </a:t>
+            </a:r>
+            <a:r>
+              <a:rPr lang="en-IN" sz="1400" b="0" i="0" dirty="0">
+                <a:solidFill>
+                  <a:srgbClr val="333333"/>
+                </a:solidFill>
+                <a:latin typeface="Calibri"/>
+              </a:rPr>
+              <a:t>-</a:t>
+            </a:r>
+            <a:r>
+              <a:rPr sz="1400" b="0" i="0" dirty="0">
+                <a:solidFill>
+                  <a:srgbClr val="333333"/>
+                </a:solidFill>
+                <a:latin typeface="Calibri"/>
+              </a:rPr>
+              <a:t> once you know it, you know it everywhere</a:t>
             </a:r>
           </a:p>
         </p:txBody>
@@ -9736,13 +10429,31 @@
           <a:p>
             <a:pPr algn="l"/>
             <a:r>
-              <a:rPr sz="1400" b="0" i="0">
-                <a:solidFill>
-                  <a:srgbClr val="333333"/>
-                </a:solidFill>
-                <a:latin typeface="Calibri"/>
-              </a:rPr>
-              <a:t>Avoid running everything as root — use capabilities for least-privilege</a:t>
+              <a:rPr sz="1400" b="0" i="0" dirty="0">
+                <a:solidFill>
+                  <a:srgbClr val="333333"/>
+                </a:solidFill>
+                <a:latin typeface="Calibri"/>
+              </a:rPr>
+              <a:t>Avoid running everything as root </a:t>
+            </a:r>
+            <a:r>
+              <a:rPr lang="en-IN" sz="1400" b="0" i="0" dirty="0">
+                <a:solidFill>
+                  <a:srgbClr val="333333"/>
+                </a:solidFill>
+                <a:latin typeface="Calibri"/>
+              </a:rPr>
+              <a:t>-</a:t>
+            </a:r>
+            <a:r>
+              <a:rPr sz="1400" b="0" i="0" dirty="0">
+                <a:solidFill>
+                  <a:srgbClr val="333333"/>
+                </a:solidFill>
+                <a:latin typeface="Calibri"/>
+              </a:rPr>
+              <a:t> use capabilities for least-privilege</a:t>
             </a:r>
           </a:p>
         </p:txBody>
@@ -10050,7 +10761,52 @@
                 </a:solidFill>
                 <a:latin typeface="Calibri"/>
               </a:rPr>
-              <a:t>Linux Fundamentals — Part 2 — </a:t>
+              <a:t>Linux Fundamentals </a:t>
+            </a:r>
+            <a:r>
+              <a:rPr lang="en-IN" sz="1400">
+                <a:solidFill>
+                  <a:srgbClr val="333333"/>
+                </a:solidFill>
+                <a:latin typeface="Calibri"/>
+              </a:rPr>
+              <a:t>-</a:t>
+            </a:r>
+            <a:r>
+              <a:rPr sz="1400">
+                <a:solidFill>
+                  <a:srgbClr val="333333"/>
+                </a:solidFill>
+                <a:latin typeface="Calibri"/>
+              </a:rPr>
+              <a:t> </a:t>
+            </a:r>
+            <a:r>
+              <a:rPr sz="1400" dirty="0">
+                <a:solidFill>
+                  <a:srgbClr val="333333"/>
+                </a:solidFill>
+                <a:latin typeface="Calibri"/>
+              </a:rPr>
+              <a:t>Part 2 </a:t>
+            </a:r>
+            <a:r>
+              <a:rPr lang="en-IN" sz="1400" dirty="0">
+                <a:solidFill>
+                  <a:srgbClr val="333333"/>
+                </a:solidFill>
+                <a:latin typeface="Calibri"/>
+              </a:rPr>
+              <a:t>-</a:t>
+            </a:r>
+            <a:r>
+              <a:rPr sz="1400" dirty="0">
+                <a:solidFill>
+                  <a:srgbClr val="333333"/>
+                </a:solidFill>
+                <a:latin typeface="Calibri"/>
+              </a:rPr>
+              <a:t> </a:t>
             </a:r>
             <a:r>
               <a:rPr sz="1400" dirty="0" err="1">
